--- a/dist/초1/국어/말과글/초1_국어_말과글_01_문장으로말하고쓰기_학생용.pptx
+++ b/dist/초1/국어/말과글/초1_국어_말과글_01_문장으로말하고쓰기_학생용.pptx
@@ -119,20 +119,20 @@
   <p:extLst>
     <p:ext uri="{521415D9-36F7-43E2-AB2F-B90AF26B5E84}">
       <p14:sectionLst xmlns:p14="http://schemas.microsoft.com/office/powerpoint/2010/main">
-        <p14:section name="도입" id="{d20f1cd3-6504-9ab5-edd7-b801ee09c400}">
+        <p14:section name="도입" id="{4bff9d91-6f73-b87a-58ef-3e3b96bfdf4a}">
           <p14:sldIdLst>
             <p14:sldId id="256"/>
             <p14:sldId id="257"/>
           </p14:sldIdLst>
         </p14:section>
-        <p14:section name="개념" id="{e6490359-a5fb-35e8-0598-2483a2d6add3}">
+        <p14:section name="개념" id="{0b73611c-e434-9271-35ba-b583f245f5b6}">
           <p14:sldIdLst>
             <p14:sldId id="258"/>
             <p14:sldId id="259"/>
             <p14:sldId id="260"/>
           </p14:sldIdLst>
         </p14:section>
-        <p14:section name="연습" id="{fff88c63-0216-fb86-8586-fc135f48bd2e}">
+        <p14:section name="연습" id="{53347fcf-3842-43c8-4797-1852bcafb5f3}">
           <p14:sldIdLst>
             <p14:sldId id="261"/>
             <p14:sldId id="262"/>
@@ -140,18 +140,18 @@
             <p14:sldId id="264"/>
           </p14:sldIdLst>
         </p14:section>
-        <p14:section name="확인" id="{595d8f9b-9f54-9ef9-0648-0f9a23e8ad54}">
+        <p14:section name="확인" id="{82abe831-987f-3ed3-253d-899f72b2656c}">
           <p14:sldIdLst>
             <p14:sldId id="265"/>
             <p14:sldId id="266"/>
           </p14:sldIdLst>
         </p14:section>
-        <p14:section name="정리" id="{fa6e9161-ab00-1dbe-1253-6d8e1fb6bd60}">
+        <p14:section name="정리" id="{44daa65a-ea8a-29cc-eeac-b8aa3d3fe9f5}">
           <p14:sldIdLst>
             <p14:sldId id="267"/>
           </p14:sldIdLst>
         </p14:section>
-        <p14:section name="보충" id="{c423ecc6-9c33-3470-251a-6a1d29508e2d}">
+        <p14:section name="보충" id="{9a3030b9-422d-2557-d1f0-9e63da56fb81}">
           <p14:sldIdLst>
             <p14:sldId id="268"/>
           </p14:sldIdLst>

--- a/dist/초1/국어/말과글/초1_국어_말과글_01_문장으로말하고쓰기_학생용.pptx
+++ b/dist/초1/국어/말과글/초1_국어_말과글_01_문장으로말하고쓰기_학생용.pptx
@@ -119,20 +119,20 @@
   <p:extLst>
     <p:ext uri="{521415D9-36F7-43E2-AB2F-B90AF26B5E84}">
       <p14:sectionLst xmlns:p14="http://schemas.microsoft.com/office/powerpoint/2010/main">
-        <p14:section name="도입" id="{4bff9d91-6f73-b87a-58ef-3e3b96bfdf4a}">
+        <p14:section name="도입" id="{3bc8a43b-797f-5ea5-9eeb-ec02911548ba}">
           <p14:sldIdLst>
             <p14:sldId id="256"/>
             <p14:sldId id="257"/>
           </p14:sldIdLst>
         </p14:section>
-        <p14:section name="개념" id="{0b73611c-e434-9271-35ba-b583f245f5b6}">
+        <p14:section name="개념" id="{96d59547-f317-cf30-c517-d0f4c68f2611}">
           <p14:sldIdLst>
             <p14:sldId id="258"/>
             <p14:sldId id="259"/>
             <p14:sldId id="260"/>
           </p14:sldIdLst>
         </p14:section>
-        <p14:section name="연습" id="{53347fcf-3842-43c8-4797-1852bcafb5f3}">
+        <p14:section name="연습" id="{dae86308-cc07-b987-3d84-99a625fcfe77}">
           <p14:sldIdLst>
             <p14:sldId id="261"/>
             <p14:sldId id="262"/>
@@ -140,18 +140,18 @@
             <p14:sldId id="264"/>
           </p14:sldIdLst>
         </p14:section>
-        <p14:section name="확인" id="{82abe831-987f-3ed3-253d-899f72b2656c}">
+        <p14:section name="확인" id="{90682269-88a0-64ae-8254-bb433840099a}">
           <p14:sldIdLst>
             <p14:sldId id="265"/>
             <p14:sldId id="266"/>
           </p14:sldIdLst>
         </p14:section>
-        <p14:section name="정리" id="{44daa65a-ea8a-29cc-eeac-b8aa3d3fe9f5}">
+        <p14:section name="정리" id="{3cde0c51-c478-9097-b605-101156324574}">
           <p14:sldIdLst>
             <p14:sldId id="267"/>
           </p14:sldIdLst>
         </p14:section>
-        <p14:section name="보충" id="{9a3030b9-422d-2557-d1f0-9e63da56fb81}">
+        <p14:section name="보충" id="{0b068382-aff9-00ac-1224-8eedda86a244}">
           <p14:sldIdLst>
             <p14:sldId id="268"/>
           </p14:sldIdLst>
